--- a/labs/lab-11-agent-scope-and-knowledge/data/checkpoints/Lumina_HR_Management_Example.pptx
+++ b/labs/lab-11-agent-scope-and-knowledge/data/checkpoints/Lumina_HR_Management_Example.pptx
@@ -4448,7 +4448,7 @@
               <a:defRPr sz="1000"/>
             </a:pPr>
             <a:r>
-              <a:t>TGS-2024043856 v9.1 | Synthetic Lumina example | 2026-09-30 | All filters All | Slide1</a:t>
+              <a:t>TGS-2024043856 v9.2 | Synthetic Lumina example | 2026-09-30 | All filters All | Slide1</a:t>
             </a:r>
           </a:p>
         </p:txBody>
@@ -4598,7 +4598,7 @@
               <a:defRPr sz="1000"/>
             </a:pPr>
             <a:r>
-              <a:t>TGS-2024043856 v9.1 | Synthetic Lumina example | 2026-09-30 | All filters All | Slide2</a:t>
+              <a:t>TGS-2024043856 v9.2 | Synthetic Lumina example | 2026-09-30 | All filters All | Slide2</a:t>
             </a:r>
           </a:p>
         </p:txBody>
@@ -4731,7 +4731,7 @@
               <a:defRPr sz="1000"/>
             </a:pPr>
             <a:r>
-              <a:t>TGS-2024043856 v9.1 | Synthetic Lumina example | 2026-09-30 | All filters All | Slide3</a:t>
+              <a:t>TGS-2024043856 v9.2 | Synthetic Lumina example | 2026-09-30 | All filters All | Slide3</a:t>
             </a:r>
           </a:p>
         </p:txBody>
@@ -4864,7 +4864,7 @@
               <a:defRPr sz="1000"/>
             </a:pPr>
             <a:r>
-              <a:t>TGS-2024043856 v9.1 | Synthetic Lumina example | 2026-09-30 | All filters All | Slide4</a:t>
+              <a:t>TGS-2024043856 v9.2 | Synthetic Lumina example | 2026-09-30 | All filters All | Slide4</a:t>
             </a:r>
           </a:p>
         </p:txBody>
@@ -5014,7 +5014,7 @@
               <a:defRPr sz="1000"/>
             </a:pPr>
             <a:r>
-              <a:t>TGS-2024043856 v9.1 | Synthetic Lumina example | 2026-09-30 | All filters All | Slide5</a:t>
+              <a:t>TGS-2024043856 v9.2 | Synthetic Lumina example | 2026-09-30 | All filters All | Slide5</a:t>
             </a:r>
           </a:p>
         </p:txBody>
@@ -5164,7 +5164,7 @@
               <a:defRPr sz="1000"/>
             </a:pPr>
             <a:r>
-              <a:t>TGS-2024043856 v9.1 | Synthetic Lumina example | 2026-09-30 | All filters All | Slide6</a:t>
+              <a:t>TGS-2024043856 v9.2 | Synthetic Lumina example | 2026-09-30 | All filters All | Slide6</a:t>
             </a:r>
           </a:p>
         </p:txBody>
@@ -5314,7 +5314,7 @@
               <a:defRPr sz="1000"/>
             </a:pPr>
             <a:r>
-              <a:t>TGS-2024043856 v9.1 | Synthetic Lumina example | 2026-09-30 | All filters All | Slide7</a:t>
+              <a:t>TGS-2024043856 v9.2 | Synthetic Lumina example | 2026-09-30 | All filters All | Slide7</a:t>
             </a:r>
           </a:p>
         </p:txBody>
@@ -5464,7 +5464,7 @@
               <a:defRPr sz="1000"/>
             </a:pPr>
             <a:r>
-              <a:t>TGS-2024043856 v9.1 | Synthetic Lumina example | 2026-09-30 | All filters All | Slide8</a:t>
+              <a:t>TGS-2024043856 v9.2 | Synthetic Lumina example | 2026-09-30 | All filters All | Slide8</a:t>
             </a:r>
           </a:p>
         </p:txBody>

--- a/labs/lab-11-agent-scope-and-knowledge/data/checkpoints/Lumina_HR_Management_Example.pptx
+++ b/labs/lab-11-agent-scope-and-knowledge/data/checkpoints/Lumina_HR_Management_Example.pptx
@@ -4448,7 +4448,7 @@
               <a:defRPr sz="1000"/>
             </a:pPr>
             <a:r>
-              <a:t>TGS-2024043856 v9.2 | Synthetic Lumina example | 2026-09-30 | All filters All | Slide1</a:t>
+              <a:t>TGS-2024043856 v9.3 | Synthetic Lumina example | 2026-09-30 | All filters All | Slide1</a:t>
             </a:r>
           </a:p>
         </p:txBody>
@@ -4598,7 +4598,7 @@
               <a:defRPr sz="1000"/>
             </a:pPr>
             <a:r>
-              <a:t>TGS-2024043856 v9.2 | Synthetic Lumina example | 2026-09-30 | All filters All | Slide2</a:t>
+              <a:t>TGS-2024043856 v9.3 | Synthetic Lumina example | 2026-09-30 | All filters All | Slide2</a:t>
             </a:r>
           </a:p>
         </p:txBody>
@@ -4731,7 +4731,7 @@
               <a:defRPr sz="1000"/>
             </a:pPr>
             <a:r>
-              <a:t>TGS-2024043856 v9.2 | Synthetic Lumina example | 2026-09-30 | All filters All | Slide3</a:t>
+              <a:t>TGS-2024043856 v9.3 | Synthetic Lumina example | 2026-09-30 | All filters All | Slide3</a:t>
             </a:r>
           </a:p>
         </p:txBody>
@@ -4864,7 +4864,7 @@
               <a:defRPr sz="1000"/>
             </a:pPr>
             <a:r>
-              <a:t>TGS-2024043856 v9.2 | Synthetic Lumina example | 2026-09-30 | All filters All | Slide4</a:t>
+              <a:t>TGS-2024043856 v9.3 | Synthetic Lumina example | 2026-09-30 | All filters All | Slide4</a:t>
             </a:r>
           </a:p>
         </p:txBody>
@@ -5014,7 +5014,7 @@
               <a:defRPr sz="1000"/>
             </a:pPr>
             <a:r>
-              <a:t>TGS-2024043856 v9.2 | Synthetic Lumina example | 2026-09-30 | All filters All | Slide5</a:t>
+              <a:t>TGS-2024043856 v9.3 | Synthetic Lumina example | 2026-09-30 | All filters All | Slide5</a:t>
             </a:r>
           </a:p>
         </p:txBody>
@@ -5164,7 +5164,7 @@
               <a:defRPr sz="1000"/>
             </a:pPr>
             <a:r>
-              <a:t>TGS-2024043856 v9.2 | Synthetic Lumina example | 2026-09-30 | All filters All | Slide6</a:t>
+              <a:t>TGS-2024043856 v9.3 | Synthetic Lumina example | 2026-09-30 | All filters All | Slide6</a:t>
             </a:r>
           </a:p>
         </p:txBody>
@@ -5314,7 +5314,7 @@
               <a:defRPr sz="1000"/>
             </a:pPr>
             <a:r>
-              <a:t>TGS-2024043856 v9.2 | Synthetic Lumina example | 2026-09-30 | All filters All | Slide7</a:t>
+              <a:t>TGS-2024043856 v9.3 | Synthetic Lumina example | 2026-09-30 | All filters All | Slide7</a:t>
             </a:r>
           </a:p>
         </p:txBody>
@@ -5464,7 +5464,7 @@
               <a:defRPr sz="1000"/>
             </a:pPr>
             <a:r>
-              <a:t>TGS-2024043856 v9.2 | Synthetic Lumina example | 2026-09-30 | All filters All | Slide8</a:t>
+              <a:t>TGS-2024043856 v9.3 | Synthetic Lumina example | 2026-09-30 | All filters All | Slide8</a:t>
             </a:r>
           </a:p>
         </p:txBody>

--- a/labs/lab-11-agent-scope-and-knowledge/data/checkpoints/Lumina_HR_Management_Example.pptx
+++ b/labs/lab-11-agent-scope-and-knowledge/data/checkpoints/Lumina_HR_Management_Example.pptx
@@ -4448,7 +4448,7 @@
               <a:defRPr sz="1000"/>
             </a:pPr>
             <a:r>
-              <a:t>TGS-2024043856 v9.3 | Synthetic Lumina example | 2026-09-30 | All filters All | Slide1</a:t>
+              <a:t>TGS-2024043856 v9.4 | Synthetic Lumina example | 2026-09-30 | All filters All | Slide1</a:t>
             </a:r>
           </a:p>
         </p:txBody>
@@ -4598,7 +4598,7 @@
               <a:defRPr sz="1000"/>
             </a:pPr>
             <a:r>
-              <a:t>TGS-2024043856 v9.3 | Synthetic Lumina example | 2026-09-30 | All filters All | Slide2</a:t>
+              <a:t>TGS-2024043856 v9.4 | Synthetic Lumina example | 2026-09-30 | All filters All | Slide2</a:t>
             </a:r>
           </a:p>
         </p:txBody>
@@ -4731,7 +4731,7 @@
               <a:defRPr sz="1000"/>
             </a:pPr>
             <a:r>
-              <a:t>TGS-2024043856 v9.3 | Synthetic Lumina example | 2026-09-30 | All filters All | Slide3</a:t>
+              <a:t>TGS-2024043856 v9.4 | Synthetic Lumina example | 2026-09-30 | All filters All | Slide3</a:t>
             </a:r>
           </a:p>
         </p:txBody>
@@ -4864,7 +4864,7 @@
               <a:defRPr sz="1000"/>
             </a:pPr>
             <a:r>
-              <a:t>TGS-2024043856 v9.3 | Synthetic Lumina example | 2026-09-30 | All filters All | Slide4</a:t>
+              <a:t>TGS-2024043856 v9.4 | Synthetic Lumina example | 2026-09-30 | All filters All | Slide4</a:t>
             </a:r>
           </a:p>
         </p:txBody>
@@ -5014,7 +5014,7 @@
               <a:defRPr sz="1000"/>
             </a:pPr>
             <a:r>
-              <a:t>TGS-2024043856 v9.3 | Synthetic Lumina example | 2026-09-30 | All filters All | Slide5</a:t>
+              <a:t>TGS-2024043856 v9.4 | Synthetic Lumina example | 2026-09-30 | All filters All | Slide5</a:t>
             </a:r>
           </a:p>
         </p:txBody>
@@ -5164,7 +5164,7 @@
               <a:defRPr sz="1000"/>
             </a:pPr>
             <a:r>
-              <a:t>TGS-2024043856 v9.3 | Synthetic Lumina example | 2026-09-30 | All filters All | Slide6</a:t>
+              <a:t>TGS-2024043856 v9.4 | Synthetic Lumina example | 2026-09-30 | All filters All | Slide6</a:t>
             </a:r>
           </a:p>
         </p:txBody>
@@ -5314,7 +5314,7 @@
               <a:defRPr sz="1000"/>
             </a:pPr>
             <a:r>
-              <a:t>TGS-2024043856 v9.3 | Synthetic Lumina example | 2026-09-30 | All filters All | Slide7</a:t>
+              <a:t>TGS-2024043856 v9.4 | Synthetic Lumina example | 2026-09-30 | All filters All | Slide7</a:t>
             </a:r>
           </a:p>
         </p:txBody>
@@ -5464,7 +5464,7 @@
               <a:defRPr sz="1000"/>
             </a:pPr>
             <a:r>
-              <a:t>TGS-2024043856 v9.3 | Synthetic Lumina example | 2026-09-30 | All filters All | Slide8</a:t>
+              <a:t>TGS-2024043856 v9.4 | Synthetic Lumina example | 2026-09-30 | All filters All | Slide8</a:t>
             </a:r>
           </a:p>
         </p:txBody>

--- a/labs/lab-11-agent-scope-and-knowledge/data/checkpoints/Lumina_HR_Management_Example.pptx
+++ b/labs/lab-11-agent-scope-and-knowledge/data/checkpoints/Lumina_HR_Management_Example.pptx
@@ -4448,7 +4448,7 @@
               <a:defRPr sz="1000"/>
             </a:pPr>
             <a:r>
-              <a:t>TGS-2024043856 v9.4 | Synthetic Lumina example | 2026-09-30 | All filters All | Slide1</a:t>
+              <a:t>TGS-2024043856 v9.5 | Synthetic Lumina example | 2026-09-30 | All filters All | Slide1</a:t>
             </a:r>
           </a:p>
         </p:txBody>
@@ -4598,7 +4598,7 @@
               <a:defRPr sz="1000"/>
             </a:pPr>
             <a:r>
-              <a:t>TGS-2024043856 v9.4 | Synthetic Lumina example | 2026-09-30 | All filters All | Slide2</a:t>
+              <a:t>TGS-2024043856 v9.5 | Synthetic Lumina example | 2026-09-30 | All filters All | Slide2</a:t>
             </a:r>
           </a:p>
         </p:txBody>
@@ -4731,7 +4731,7 @@
               <a:defRPr sz="1000"/>
             </a:pPr>
             <a:r>
-              <a:t>TGS-2024043856 v9.4 | Synthetic Lumina example | 2026-09-30 | All filters All | Slide3</a:t>
+              <a:t>TGS-2024043856 v9.5 | Synthetic Lumina example | 2026-09-30 | All filters All | Slide3</a:t>
             </a:r>
           </a:p>
         </p:txBody>
@@ -4864,7 +4864,7 @@
               <a:defRPr sz="1000"/>
             </a:pPr>
             <a:r>
-              <a:t>TGS-2024043856 v9.4 | Synthetic Lumina example | 2026-09-30 | All filters All | Slide4</a:t>
+              <a:t>TGS-2024043856 v9.5 | Synthetic Lumina example | 2026-09-30 | All filters All | Slide4</a:t>
             </a:r>
           </a:p>
         </p:txBody>
@@ -5014,7 +5014,7 @@
               <a:defRPr sz="1000"/>
             </a:pPr>
             <a:r>
-              <a:t>TGS-2024043856 v9.4 | Synthetic Lumina example | 2026-09-30 | All filters All | Slide5</a:t>
+              <a:t>TGS-2024043856 v9.5 | Synthetic Lumina example | 2026-09-30 | All filters All | Slide5</a:t>
             </a:r>
           </a:p>
         </p:txBody>
@@ -5164,7 +5164,7 @@
               <a:defRPr sz="1000"/>
             </a:pPr>
             <a:r>
-              <a:t>TGS-2024043856 v9.4 | Synthetic Lumina example | 2026-09-30 | All filters All | Slide6</a:t>
+              <a:t>TGS-2024043856 v9.5 | Synthetic Lumina example | 2026-09-30 | All filters All | Slide6</a:t>
             </a:r>
           </a:p>
         </p:txBody>
@@ -5314,7 +5314,7 @@
               <a:defRPr sz="1000"/>
             </a:pPr>
             <a:r>
-              <a:t>TGS-2024043856 v9.4 | Synthetic Lumina example | 2026-09-30 | All filters All | Slide7</a:t>
+              <a:t>TGS-2024043856 v9.5 | Synthetic Lumina example | 2026-09-30 | All filters All | Slide7</a:t>
             </a:r>
           </a:p>
         </p:txBody>
@@ -5464,7 +5464,7 @@
               <a:defRPr sz="1000"/>
             </a:pPr>
             <a:r>
-              <a:t>TGS-2024043856 v9.4 | Synthetic Lumina example | 2026-09-30 | All filters All | Slide8</a:t>
+              <a:t>TGS-2024043856 v9.5 | Synthetic Lumina example | 2026-09-30 | All filters All | Slide8</a:t>
             </a:r>
           </a:p>
         </p:txBody>
